--- a/dist/초4/영어/소리낱말문장/초4_영어_소리낱말문장_02_세글자낱말읽고쓰기_학생용.pptx
+++ b/dist/초4/영어/소리낱말문장/초4_영어_소리낱말문장_02_세글자낱말읽고쓰기_학생용.pptx
@@ -119,20 +119,20 @@
   <p:extLst>
     <p:ext uri="{521415D9-36F7-43E2-AB2F-B90AF26B5E84}">
       <p14:sectionLst xmlns:p14="http://schemas.microsoft.com/office/powerpoint/2010/main">
-        <p14:section name="도입" id="{8178c333-01a2-b0b5-1397-eaab352854cb}">
+        <p14:section name="도입" id="{a11e4e0e-b38d-575c-c581-1312b79c5eff}">
           <p14:sldIdLst>
             <p14:sldId id="256"/>
             <p14:sldId id="257"/>
           </p14:sldIdLst>
         </p14:section>
-        <p14:section name="개념" id="{c40e8ec3-4908-0f2c-d9c0-f762cfbdb9de}">
+        <p14:section name="개념" id="{5c9dff3b-80ee-51cb-e0c0-22577ccfe7c0}">
           <p14:sldIdLst>
             <p14:sldId id="258"/>
             <p14:sldId id="259"/>
             <p14:sldId id="263"/>
           </p14:sldIdLst>
         </p14:section>
-        <p14:section name="연습" id="{86cb820a-08a7-0aa0-c24d-170a687f5b66}">
+        <p14:section name="연습" id="{ab4c10e4-ff41-1bb3-4a9e-fe21f849b0d2}">
           <p14:sldIdLst>
             <p14:sldId id="260"/>
             <p14:sldId id="261"/>
@@ -140,24 +140,24 @@
             <p14:sldId id="264"/>
           </p14:sldIdLst>
         </p14:section>
-        <p14:section name="개념" id="{4454bdb1-45fb-3ce8-4bce-91701c943b80}">
+        <p14:section name="개념" id="{44aa0fb8-0708-7783-4884-17c097859946}">
           <p14:sldIdLst/>
         </p14:section>
-        <p14:section name="연습" id="{81fdf667-2a5f-c212-c40c-c21538220bb6}">
+        <p14:section name="연습" id="{15f632eb-8aca-810e-2a02-a5d264047834}">
           <p14:sldIdLst/>
         </p14:section>
-        <p14:section name="확인" id="{93f8ee1b-f406-5233-b010-ca706b247787}">
+        <p14:section name="확인" id="{ccde9aeb-8a86-8940-acc5-b81ec1b7c7c0}">
           <p14:sldIdLst>
             <p14:sldId id="265"/>
             <p14:sldId id="266"/>
           </p14:sldIdLst>
         </p14:section>
-        <p14:section name="정리" id="{56b00a66-c384-70e7-c046-89744e83615a}">
+        <p14:section name="정리" id="{afd8f5b5-7aa4-010e-c74c-cc9a79ed6b6a}">
           <p14:sldIdLst>
             <p14:sldId id="267"/>
           </p14:sldIdLst>
         </p14:section>
-        <p14:section name="보충" id="{03a36d7c-c0c6-2178-1099-069271638338}">
+        <p14:section name="보충" id="{3b9da633-6269-1b0f-ab23-c140231b623c}">
           <p14:sldIdLst>
             <p14:sldId id="268"/>
           </p14:sldIdLst>

--- a/dist/초4/영어/소리낱말문장/초4_영어_소리낱말문장_02_세글자낱말읽고쓰기_학생용.pptx
+++ b/dist/초4/영어/소리낱말문장/초4_영어_소리낱말문장_02_세글자낱말읽고쓰기_학생용.pptx
@@ -119,20 +119,20 @@
   <p:extLst>
     <p:ext uri="{521415D9-36F7-43E2-AB2F-B90AF26B5E84}">
       <p14:sectionLst xmlns:p14="http://schemas.microsoft.com/office/powerpoint/2010/main">
-        <p14:section name="도입" id="{a11e4e0e-b38d-575c-c581-1312b79c5eff}">
+        <p14:section name="도입" id="{03cb0f5b-8c31-27b7-d4d9-ac36f75260e2}">
           <p14:sldIdLst>
             <p14:sldId id="256"/>
             <p14:sldId id="257"/>
           </p14:sldIdLst>
         </p14:section>
-        <p14:section name="개념" id="{5c9dff3b-80ee-51cb-e0c0-22577ccfe7c0}">
+        <p14:section name="개념" id="{a948664e-613a-3c3b-9061-eb66b205c9b5}">
           <p14:sldIdLst>
             <p14:sldId id="258"/>
             <p14:sldId id="259"/>
             <p14:sldId id="263"/>
           </p14:sldIdLst>
         </p14:section>
-        <p14:section name="연습" id="{ab4c10e4-ff41-1bb3-4a9e-fe21f849b0d2}">
+        <p14:section name="연습" id="{4257b597-96f9-9ed4-5541-b97fe1ac6bd5}">
           <p14:sldIdLst>
             <p14:sldId id="260"/>
             <p14:sldId id="261"/>
@@ -140,24 +140,24 @@
             <p14:sldId id="264"/>
           </p14:sldIdLst>
         </p14:section>
-        <p14:section name="개념" id="{44aa0fb8-0708-7783-4884-17c097859946}">
+        <p14:section name="개념" id="{ff5e672d-8032-b0ce-8db6-a4d0ecbba896}">
           <p14:sldIdLst/>
         </p14:section>
-        <p14:section name="연습" id="{15f632eb-8aca-810e-2a02-a5d264047834}">
+        <p14:section name="연습" id="{bd43cb53-de3e-fcc3-d280-08d9ad0857e0}">
           <p14:sldIdLst/>
         </p14:section>
-        <p14:section name="확인" id="{ccde9aeb-8a86-8940-acc5-b81ec1b7c7c0}">
+        <p14:section name="확인" id="{903db0e7-1180-651d-3706-80461a69baa4}">
           <p14:sldIdLst>
             <p14:sldId id="265"/>
             <p14:sldId id="266"/>
           </p14:sldIdLst>
         </p14:section>
-        <p14:section name="정리" id="{afd8f5b5-7aa4-010e-c74c-cc9a79ed6b6a}">
+        <p14:section name="정리" id="{dab868b4-5728-8779-2d95-88b42f8506f1}">
           <p14:sldIdLst>
             <p14:sldId id="267"/>
           </p14:sldIdLst>
         </p14:section>
-        <p14:section name="보충" id="{3b9da633-6269-1b0f-ab23-c140231b623c}">
+        <p14:section name="보충" id="{4f4a2d93-8645-eb89-df63-a331732455ee}">
           <p14:sldIdLst>
             <p14:sldId id="268"/>
           </p14:sldIdLst>

--- a/dist/초4/영어/소리낱말문장/초4_영어_소리낱말문장_02_세글자낱말읽고쓰기_학생용.pptx
+++ b/dist/초4/영어/소리낱말문장/초4_영어_소리낱말문장_02_세글자낱말읽고쓰기_학생용.pptx
@@ -119,20 +119,20 @@
   <p:extLst>
     <p:ext uri="{521415D9-36F7-43E2-AB2F-B90AF26B5E84}">
       <p14:sectionLst xmlns:p14="http://schemas.microsoft.com/office/powerpoint/2010/main">
-        <p14:section name="도입" id="{03cb0f5b-8c31-27b7-d4d9-ac36f75260e2}">
+        <p14:section name="도입" id="{697d7d38-ce41-8a35-7de2-63351a5a958d}">
           <p14:sldIdLst>
             <p14:sldId id="256"/>
             <p14:sldId id="257"/>
           </p14:sldIdLst>
         </p14:section>
-        <p14:section name="개념" id="{a948664e-613a-3c3b-9061-eb66b205c9b5}">
+        <p14:section name="개념" id="{8705c0f5-1a15-3aac-07e9-3dbaa37ee08c}">
           <p14:sldIdLst>
             <p14:sldId id="258"/>
             <p14:sldId id="259"/>
             <p14:sldId id="263"/>
           </p14:sldIdLst>
         </p14:section>
-        <p14:section name="연습" id="{4257b597-96f9-9ed4-5541-b97fe1ac6bd5}">
+        <p14:section name="연습" id="{cc1f3b5b-ba01-f80b-5d80-68747effbcc2}">
           <p14:sldIdLst>
             <p14:sldId id="260"/>
             <p14:sldId id="261"/>
@@ -140,24 +140,24 @@
             <p14:sldId id="264"/>
           </p14:sldIdLst>
         </p14:section>
-        <p14:section name="개념" id="{ff5e672d-8032-b0ce-8db6-a4d0ecbba896}">
+        <p14:section name="개념" id="{e04c3a75-163c-d128-1dc3-8bc21dbcb632}">
           <p14:sldIdLst/>
         </p14:section>
-        <p14:section name="연습" id="{bd43cb53-de3e-fcc3-d280-08d9ad0857e0}">
+        <p14:section name="연습" id="{bef265df-0d03-540c-df82-8d08db54578b}">
           <p14:sldIdLst/>
         </p14:section>
-        <p14:section name="확인" id="{903db0e7-1180-651d-3706-80461a69baa4}">
+        <p14:section name="확인" id="{39e0e8d4-fca5-0822-509e-748df3951044}">
           <p14:sldIdLst>
             <p14:sldId id="265"/>
             <p14:sldId id="266"/>
           </p14:sldIdLst>
         </p14:section>
-        <p14:section name="정리" id="{dab868b4-5728-8779-2d95-88b42f8506f1}">
+        <p14:section name="정리" id="{07db00ca-00b4-70d4-297c-dfb32aad5793}">
           <p14:sldIdLst>
             <p14:sldId id="267"/>
           </p14:sldIdLst>
         </p14:section>
-        <p14:section name="보충" id="{4f4a2d93-8645-eb89-df63-a331732455ee}">
+        <p14:section name="보충" id="{53e61c3c-7830-dde9-e325-5afb3642be61}">
           <p14:sldIdLst>
             <p14:sldId id="268"/>
           </p14:sldIdLst>
